--- a/dist/초4/국어/읽기와요약/초4_국어_읽기와요약_02_글의짜임.pptx
+++ b/dist/초4/국어/읽기와요약/초4_국어_읽기와요약_02_글의짜임.pptx
@@ -121,13 +121,13 @@
   <p:extLst>
     <p:ext uri="{521415D9-36F7-43E2-AB2F-B90AF26B5E84}">
       <p14:sectionLst xmlns:p14="http://schemas.microsoft.com/office/powerpoint/2010/main">
-        <p14:section name="도입" id="{dce43294-d741-982b-b0ec-80f80cecbaee}">
+        <p14:section name="도입" id="{9066b065-12bb-a899-bbcd-f80b577f9459}">
           <p14:sldIdLst>
             <p14:sldId id="256"/>
             <p14:sldId id="257"/>
           </p14:sldIdLst>
         </p14:section>
-        <p14:section name="개념" id="{554b0c0f-2e66-3432-7f4d-a9c468f22291}">
+        <p14:section name="개념" id="{ed245ed4-99db-59af-c605-ce2baeb54b28}">
           <p14:sldIdLst>
             <p14:sldId id="258"/>
             <p14:sldId id="259"/>
@@ -137,25 +137,25 @@
             <p14:sldId id="263"/>
           </p14:sldIdLst>
         </p14:section>
-        <p14:section name="연습" id="{74ce0c0e-6795-30e5-0733-347c89be8973}">
+        <p14:section name="연습" id="{498404fd-52d4-3180-b5f2-f02a7dd29ac8}">
           <p14:sldIdLst>
             <p14:sldId id="264"/>
             <p14:sldId id="265"/>
           </p14:sldIdLst>
         </p14:section>
-        <p14:section name="확인" id="{a5a72a49-0a88-0971-56fd-7c3b05fd200b}">
+        <p14:section name="확인" id="{8a1133e0-e0f2-df2a-481f-a56e1a392e26}">
           <p14:sldIdLst>
             <p14:sldId id="266"/>
             <p14:sldId id="267"/>
             <p14:sldId id="268"/>
           </p14:sldIdLst>
         </p14:section>
-        <p14:section name="정리" id="{541c01b4-25c1-1b4a-1e7d-d36ef698efca}">
+        <p14:section name="정리" id="{cff20cca-fdc1-04d5-a556-fafcd4e81c98}">
           <p14:sldIdLst>
             <p14:sldId id="269"/>
           </p14:sldIdLst>
         </p14:section>
-        <p14:section name="보충" id="{b56c8535-5b47-acb2-85f3-5081cdcc6dc5}">
+        <p14:section name="보충" id="{3a25a6c2-8756-9eb0-9e22-29d4c6f7f98a}">
           <p14:sldIdLst>
             <p14:sldId id="270"/>
           </p14:sldIdLst>
@@ -8143,7 +8143,7 @@
           </p:nvPr>
         </p:nvGraphicFramePr>
         <p:xfrm>
-          <a:off x="1979676" y="2428240"/>
+          <a:off x="1979676" y="2463800"/>
           <a:ext cx="8229600" cy="914400"/>
         </p:xfrm>
         <a:graphic>
@@ -8155,7 +8155,7 @@
                 <a:gridCol w="2715768"/>
                 <a:gridCol w="2715768"/>
               </a:tblGrid>
-              <a:tr h="568960">
+              <a:tr h="551180">
                 <a:tc>
                   <a:txBody>
                     <a:bodyPr/>
@@ -8361,7 +8361,7 @@
                   </a:tcPr>
                 </a:tc>
               </a:tr>
-              <a:tr h="568960">
+              <a:tr h="551180">
                 <a:tc>
                   <a:txBody>
                     <a:bodyPr/>
@@ -8567,7 +8567,7 @@
                   </a:tcPr>
                 </a:tc>
               </a:tr>
-              <a:tr h="568960">
+              <a:tr h="551180">
                 <a:tc>
                   <a:txBody>
                     <a:bodyPr/>
@@ -8773,7 +8773,7 @@
                   </a:tcPr>
                 </a:tc>
               </a:tr>
-              <a:tr h="568960">
+              <a:tr h="551180">
                 <a:tc>
                   <a:txBody>
                     <a:bodyPr/>
